--- a/ECG_2_MMAV.pptx
+++ b/ECG_2_MMAV.pptx
@@ -13403,7 +13403,7 @@
           <a:p>
             <a:fld id="{EBD7F301-041A-3945-8781-641B79E4A7F8}" type="datetimeFigureOut">
               <a:rPr lang="en-US" smtClean="0"/>
-              <a:t>8/27/26</a:t>
+              <a:t>8/28/26</a:t>
             </a:fld>
             <a:endParaRPr lang="en-US"/>
           </a:p>
@@ -14009,7 +14009,7 @@
           <a:p>
             <a:fld id="{41C8D77E-AD9C-4349-85A5-85367D10EF2B}" type="datetimeFigureOut">
               <a:rPr lang="en-US" smtClean="0"/>
-              <a:t>8/27/26</a:t>
+              <a:t>8/28/26</a:t>
             </a:fld>
             <a:endParaRPr lang="en-US"/>
           </a:p>
@@ -14207,7 +14207,7 @@
           <a:p>
             <a:fld id="{41C8D77E-AD9C-4349-85A5-85367D10EF2B}" type="datetimeFigureOut">
               <a:rPr lang="en-US" smtClean="0"/>
-              <a:t>8/27/26</a:t>
+              <a:t>8/28/26</a:t>
             </a:fld>
             <a:endParaRPr lang="en-US"/>
           </a:p>
@@ -14415,7 +14415,7 @@
           <a:p>
             <a:fld id="{41C8D77E-AD9C-4349-85A5-85367D10EF2B}" type="datetimeFigureOut">
               <a:rPr lang="en-US" smtClean="0"/>
-              <a:t>8/27/26</a:t>
+              <a:t>8/28/26</a:t>
             </a:fld>
             <a:endParaRPr lang="en-US"/>
           </a:p>
@@ -14613,7 +14613,7 @@
           <a:p>
             <a:fld id="{41C8D77E-AD9C-4349-85A5-85367D10EF2B}" type="datetimeFigureOut">
               <a:rPr lang="en-US" smtClean="0"/>
-              <a:t>8/27/26</a:t>
+              <a:t>8/28/26</a:t>
             </a:fld>
             <a:endParaRPr lang="en-US"/>
           </a:p>
@@ -14888,7 +14888,7 @@
           <a:p>
             <a:fld id="{41C8D77E-AD9C-4349-85A5-85367D10EF2B}" type="datetimeFigureOut">
               <a:rPr lang="en-US" smtClean="0"/>
-              <a:t>8/27/26</a:t>
+              <a:t>8/28/26</a:t>
             </a:fld>
             <a:endParaRPr lang="en-US"/>
           </a:p>
@@ -15153,7 +15153,7 @@
           <a:p>
             <a:fld id="{41C8D77E-AD9C-4349-85A5-85367D10EF2B}" type="datetimeFigureOut">
               <a:rPr lang="en-US" smtClean="0"/>
-              <a:t>8/27/26</a:t>
+              <a:t>8/28/26</a:t>
             </a:fld>
             <a:endParaRPr lang="en-US"/>
           </a:p>
@@ -15565,7 +15565,7 @@
           <a:p>
             <a:fld id="{41C8D77E-AD9C-4349-85A5-85367D10EF2B}" type="datetimeFigureOut">
               <a:rPr lang="en-US" smtClean="0"/>
-              <a:t>8/27/26</a:t>
+              <a:t>8/28/26</a:t>
             </a:fld>
             <a:endParaRPr lang="en-US"/>
           </a:p>
@@ -15706,7 +15706,7 @@
           <a:p>
             <a:fld id="{41C8D77E-AD9C-4349-85A5-85367D10EF2B}" type="datetimeFigureOut">
               <a:rPr lang="en-US" smtClean="0"/>
-              <a:t>8/27/26</a:t>
+              <a:t>8/28/26</a:t>
             </a:fld>
             <a:endParaRPr lang="en-US"/>
           </a:p>
@@ -15819,7 +15819,7 @@
           <a:p>
             <a:fld id="{41C8D77E-AD9C-4349-85A5-85367D10EF2B}" type="datetimeFigureOut">
               <a:rPr lang="en-US" smtClean="0"/>
-              <a:t>8/27/26</a:t>
+              <a:t>8/28/26</a:t>
             </a:fld>
             <a:endParaRPr lang="en-US"/>
           </a:p>
@@ -16130,7 +16130,7 @@
           <a:p>
             <a:fld id="{41C8D77E-AD9C-4349-85A5-85367D10EF2B}" type="datetimeFigureOut">
               <a:rPr lang="en-US" smtClean="0"/>
-              <a:t>8/27/26</a:t>
+              <a:t>8/28/26</a:t>
             </a:fld>
             <a:endParaRPr lang="en-US"/>
           </a:p>
@@ -16418,7 +16418,7 @@
           <a:p>
             <a:fld id="{41C8D77E-AD9C-4349-85A5-85367D10EF2B}" type="datetimeFigureOut">
               <a:rPr lang="en-US" smtClean="0"/>
-              <a:t>8/27/26</a:t>
+              <a:t>8/28/26</a:t>
             </a:fld>
             <a:endParaRPr lang="en-US"/>
           </a:p>
@@ -16659,7 +16659,7 @@
           <a:p>
             <a:fld id="{41C8D77E-AD9C-4349-85A5-85367D10EF2B}" type="datetimeFigureOut">
               <a:rPr lang="en-US" smtClean="0"/>
-              <a:t>8/27/26</a:t>
+              <a:t>8/28/26</a:t>
             </a:fld>
             <a:endParaRPr lang="en-US"/>
           </a:p>
@@ -17353,7 +17353,7 @@
           <p:nvPr>
             <p:extLst>
               <p:ext uri="{D42A27DB-BD31-4B8C-83A1-F6EECF244321}">
-                <p14:modId xmlns:p14="http://schemas.microsoft.com/office/powerpoint/2010/main" val="3161787825"/>
+                <p14:modId xmlns:p14="http://schemas.microsoft.com/office/powerpoint/2010/main" val="2797363518"/>
               </p:ext>
             </p:extLst>
           </p:nvPr>
@@ -21422,6 +21422,36 @@
       </p:sp>
       <p:pic>
         <p:nvPicPr>
+          <p:cNvPr id="17" name="Picture 16">
+            <a:extLst>
+              <a:ext uri="{FF2B5EF4-FFF2-40B4-BE49-F238E27FC236}">
+                <a16:creationId xmlns:a16="http://schemas.microsoft.com/office/drawing/2014/main" id="{65B2A556-E986-07A5-0CE6-A4DA7BE88D9C}"/>
+              </a:ext>
+            </a:extLst>
+          </p:cNvPr>
+          <p:cNvPicPr>
+            <a:picLocks noChangeAspect="1"/>
+          </p:cNvPicPr>
+          <p:nvPr/>
+        </p:nvPicPr>
+        <p:blipFill>
+          <a:blip r:embed="rId2"/>
+          <a:stretch>
+            <a:fillRect/>
+          </a:stretch>
+        </p:blipFill>
+        <p:spPr>
+          <a:xfrm>
+            <a:off x="227875" y="2655374"/>
+            <a:ext cx="5818668" cy="2714889"/>
+          </a:xfrm>
+          <a:prstGeom prst="rect">
+            <a:avLst/>
+          </a:prstGeom>
+        </p:spPr>
+      </p:pic>
+      <p:pic>
+        <p:nvPicPr>
           <p:cNvPr id="11" name="Graphic 10" descr="Badge with solid fill">
             <a:extLst>
               <a:ext uri="{FF2B5EF4-FFF2-40B4-BE49-F238E27FC236}">
@@ -21438,7 +21468,7 @@
           <a:blip>
             <a:extLst>
               <a:ext uri="{96DAC541-7B7A-43D3-8B79-37D633B846F1}">
-                <asvg:svgBlip xmlns:asvg="http://schemas.microsoft.com/office/drawing/2016/SVG/main" r:embed="rId2"/>
+                <asvg:svgBlip xmlns:asvg="http://schemas.microsoft.com/office/drawing/2016/SVG/main" r:embed="rId3"/>
               </a:ext>
             </a:extLst>
           </a:blip>
@@ -21470,8 +21500,8 @@
         </p:nvSpPr>
         <p:spPr>
           <a:xfrm>
-            <a:off x="1954890" y="1487737"/>
-            <a:ext cx="2686420" cy="715089"/>
+            <a:off x="1398070" y="2135458"/>
+            <a:ext cx="3145019" cy="715089"/>
           </a:xfrm>
           <a:prstGeom prst="roundRect">
             <a:avLst/>
@@ -21502,24 +21532,54 @@
             <a:pPr algn="ctr"/>
             <a:r>
               <a:rPr lang="en-US" b="1" dirty="0"/>
-              <a:t> Binary class:</a:t>
+              <a:t>Different train/test split:</a:t>
             </a:r>
           </a:p>
           <a:p>
             <a:pPr algn="ctr"/>
             <a:r>
               <a:rPr lang="en-US" dirty="0"/>
-              <a:t>Healthy  or disease</a:t>
+              <a:t>Train 500 Val 2500 Test 2500</a:t>
             </a:r>
           </a:p>
         </p:txBody>
       </p:sp>
+      <p:pic>
+        <p:nvPicPr>
+          <p:cNvPr id="10" name="Picture 9">
+            <a:extLst>
+              <a:ext uri="{FF2B5EF4-FFF2-40B4-BE49-F238E27FC236}">
+                <a16:creationId xmlns:a16="http://schemas.microsoft.com/office/drawing/2014/main" id="{AF3749E2-21E6-F164-A9FA-0F0DFFF2543E}"/>
+              </a:ext>
+            </a:extLst>
+          </p:cNvPr>
+          <p:cNvPicPr>
+            <a:picLocks noChangeAspect="1"/>
+          </p:cNvPicPr>
+          <p:nvPr/>
+        </p:nvPicPr>
+        <p:blipFill>
+          <a:blip r:embed="rId4"/>
+          <a:stretch>
+            <a:fillRect/>
+          </a:stretch>
+        </p:blipFill>
+        <p:spPr>
+          <a:xfrm>
+            <a:off x="6184653" y="845379"/>
+            <a:ext cx="5818668" cy="2714889"/>
+          </a:xfrm>
+          <a:prstGeom prst="rect">
+            <a:avLst/>
+          </a:prstGeom>
+        </p:spPr>
+      </p:pic>
       <p:sp>
         <p:nvSpPr>
-          <p:cNvPr id="14" name="TextBox 13">
+          <p:cNvPr id="13" name="TextBox 12">
             <a:extLst>
               <a:ext uri="{FF2B5EF4-FFF2-40B4-BE49-F238E27FC236}">
-                <a16:creationId xmlns:a16="http://schemas.microsoft.com/office/drawing/2014/main" id="{45A0CAD5-A345-BF80-4552-25A0590EB25D}"/>
+                <a16:creationId xmlns:a16="http://schemas.microsoft.com/office/drawing/2014/main" id="{17331454-F144-F6A8-09AD-621581BE9A92}"/>
               </a:ext>
             </a:extLst>
           </p:cNvPr>
@@ -21528,7 +21588,7 @@
         </p:nvSpPr>
         <p:spPr>
           <a:xfrm>
-            <a:off x="7073185" y="1487736"/>
+            <a:off x="7595699" y="365175"/>
             <a:ext cx="2686420" cy="715089"/>
           </a:xfrm>
           <a:prstGeom prst="roundRect">
@@ -21568,6 +21628,129 @@
             <a:r>
               <a:rPr lang="en-US" dirty="0"/>
               <a:t>Classes 1 to 3</a:t>
+            </a:r>
+          </a:p>
+        </p:txBody>
+      </p:sp>
+      <p:pic>
+        <p:nvPicPr>
+          <p:cNvPr id="20" name="Picture 19">
+            <a:extLst>
+              <a:ext uri="{FF2B5EF4-FFF2-40B4-BE49-F238E27FC236}">
+                <a16:creationId xmlns:a16="http://schemas.microsoft.com/office/drawing/2014/main" id="{D7F804F0-4D8C-A70F-50A5-A4A1947DC48A}"/>
+              </a:ext>
+            </a:extLst>
+          </p:cNvPr>
+          <p:cNvPicPr>
+            <a:picLocks noChangeAspect="1"/>
+          </p:cNvPicPr>
+          <p:nvPr/>
+        </p:nvPicPr>
+        <p:blipFill>
+          <a:blip r:embed="rId5"/>
+          <a:stretch>
+            <a:fillRect/>
+          </a:stretch>
+        </p:blipFill>
+        <p:spPr>
+          <a:xfrm>
+            <a:off x="6617726" y="4342797"/>
+            <a:ext cx="4952522" cy="2310760"/>
+          </a:xfrm>
+          <a:prstGeom prst="rect">
+            <a:avLst/>
+          </a:prstGeom>
+        </p:spPr>
+      </p:pic>
+      <p:sp>
+        <p:nvSpPr>
+          <p:cNvPr id="18" name="TextBox 17">
+            <a:extLst>
+              <a:ext uri="{FF2B5EF4-FFF2-40B4-BE49-F238E27FC236}">
+                <a16:creationId xmlns:a16="http://schemas.microsoft.com/office/drawing/2014/main" id="{F8955CE1-73DD-3447-4B7F-BFB87F4D60D5}"/>
+              </a:ext>
+            </a:extLst>
+          </p:cNvPr>
+          <p:cNvSpPr txBox="1"/>
+          <p:nvPr/>
+        </p:nvSpPr>
+        <p:spPr>
+          <a:xfrm>
+            <a:off x="1268849" y="1331205"/>
+            <a:ext cx="2752492" cy="369332"/>
+          </a:xfrm>
+          <a:prstGeom prst="rect">
+            <a:avLst/>
+          </a:prstGeom>
+          <a:noFill/>
+        </p:spPr>
+        <p:txBody>
+          <a:bodyPr wrap="square" rtlCol="0">
+            <a:spAutoFit/>
+          </a:bodyPr>
+          <a:lstStyle/>
+          <a:p>
+            <a:r>
+              <a:rPr lang="en-US" dirty="0"/>
+              <a:t>Model: transformer</a:t>
+            </a:r>
+          </a:p>
+        </p:txBody>
+      </p:sp>
+      <p:sp>
+        <p:nvSpPr>
+          <p:cNvPr id="15" name="TextBox 14">
+            <a:extLst>
+              <a:ext uri="{FF2B5EF4-FFF2-40B4-BE49-F238E27FC236}">
+                <a16:creationId xmlns:a16="http://schemas.microsoft.com/office/drawing/2014/main" id="{FCCEECEA-8BCD-F969-BCCD-38EE8187FD9F}"/>
+              </a:ext>
+            </a:extLst>
+          </p:cNvPr>
+          <p:cNvSpPr txBox="1"/>
+          <p:nvPr/>
+        </p:nvSpPr>
+        <p:spPr>
+          <a:xfrm>
+            <a:off x="7595699" y="3869669"/>
+            <a:ext cx="2686420" cy="715089"/>
+          </a:xfrm>
+          <a:prstGeom prst="roundRect">
+            <a:avLst/>
+          </a:prstGeom>
+        </p:spPr>
+        <p:style>
+          <a:lnRef idx="2">
+            <a:schemeClr val="accent3">
+              <a:shade val="15000"/>
+            </a:schemeClr>
+          </a:lnRef>
+          <a:fillRef idx="1">
+            <a:schemeClr val="accent3"/>
+          </a:fillRef>
+          <a:effectRef idx="0">
+            <a:schemeClr val="accent3"/>
+          </a:effectRef>
+          <a:fontRef idx="minor">
+            <a:schemeClr val="lt1"/>
+          </a:fontRef>
+        </p:style>
+        <p:txBody>
+          <a:bodyPr wrap="square" rtlCol="0">
+            <a:spAutoFit/>
+          </a:bodyPr>
+          <a:lstStyle/>
+          <a:p>
+            <a:pPr algn="ctr"/>
+            <a:r>
+              <a:rPr lang="en-US" b="1" dirty="0"/>
+              <a:t>Binary class:</a:t>
+            </a:r>
+          </a:p>
+          <a:p>
+            <a:pPr algn="ctr"/>
+            <a:r>
+              <a:rPr lang="en-US" dirty="0"/>
+              <a:t>Healthy vs disease</a:t>
             </a:r>
           </a:p>
         </p:txBody>

--- a/ECG_2_MMAV.pptx
+++ b/ECG_2_MMAV.pptx
@@ -4888,7 +4888,7 @@
       </dgm:t>
     </dgm:pt>
     <dgm:pt modelId="{E507C038-E250-4907-A690-FF460810F2FC}">
-      <dgm:prSet/>
+      <dgm:prSet custT="1"/>
       <dgm:spPr/>
       <dgm:t>
         <a:bodyPr/>
@@ -4900,13 +4900,18 @@
             </a:lnSpc>
           </a:pPr>
           <a:r>
-            <a:rPr lang="en-US" b="1" dirty="0"/>
+            <a:rPr lang="en-US" sz="2200" b="1" dirty="0"/>
             <a:t>Class similarity</a:t>
           </a:r>
           <a:r>
-            <a:rPr lang="en-US" dirty="0"/>
-            <a:t>: Healthy and disease are  not distinguishable</a:t>
+            <a:rPr lang="en-US" sz="2200" dirty="0"/>
+            <a:t>: </a:t>
           </a:r>
+          <a:r>
+            <a:rPr lang="en-US" sz="2000" dirty="0"/>
+            <a:t>Healthy and disease are distinguishable but not disease class</a:t>
+          </a:r>
+          <a:endParaRPr lang="en-US" sz="2200" dirty="0"/>
         </a:p>
       </dgm:t>
     </dgm:pt>
@@ -5452,8 +5457,8 @@
       <dgm:prSet/>
       <dgm:spPr>
         <a:solidFill>
-          <a:schemeClr val="bg2">
-            <a:lumMod val="90000"/>
+          <a:schemeClr val="bg1">
+            <a:lumMod val="95000"/>
           </a:schemeClr>
         </a:solidFill>
         <a:ln>
@@ -5518,8 +5523,8 @@
       <dgm:prSet/>
       <dgm:spPr>
         <a:solidFill>
-          <a:schemeClr val="bg2">
-            <a:lumMod val="90000"/>
+          <a:schemeClr val="bg1">
+            <a:lumMod val="95000"/>
           </a:schemeClr>
         </a:solidFill>
         <a:ln>
@@ -5596,79 +5601,12 @@
         </a:p>
       </dgm:t>
     </dgm:pt>
-    <dgm:pt modelId="{780EBD0C-B05F-8F4C-A7E5-C87DAC98B864}">
-      <dgm:prSet/>
-      <dgm:spPr>
-        <a:solidFill>
-          <a:schemeClr val="bg2">
-            <a:lumMod val="90000"/>
-          </a:schemeClr>
-        </a:solidFill>
-        <a:ln>
-          <a:noFill/>
-        </a:ln>
-      </dgm:spPr>
-      <dgm:t>
-        <a:bodyPr/>
-        <a:lstStyle/>
-        <a:p>
-          <a:r>
-            <a:rPr lang="en-US" b="1" dirty="0">
-              <a:solidFill>
-                <a:schemeClr val="tx2">
-                  <a:lumMod val="75000"/>
-                  <a:lumOff val="25000"/>
-                </a:schemeClr>
-              </a:solidFill>
-            </a:rPr>
-            <a:t>Hyperparameter tunning</a:t>
-          </a:r>
-          <a:r>
-            <a:rPr lang="en-US" dirty="0">
-              <a:solidFill>
-                <a:schemeClr val="tx2">
-                  <a:lumMod val="75000"/>
-                  <a:lumOff val="25000"/>
-                </a:schemeClr>
-              </a:solidFill>
-            </a:rPr>
-            <a:t>: </a:t>
-          </a:r>
-          <a:r>
-            <a:rPr lang="en-US" dirty="0"/>
-            <a:t>Better fitted from more complex tasks</a:t>
-          </a:r>
-        </a:p>
-      </dgm:t>
-    </dgm:pt>
-    <dgm:pt modelId="{E4FF93A7-BCE2-1146-87A5-76D608855813}" type="parTrans" cxnId="{6A4FC6C7-58A9-6B46-85E5-00C8A1CFA1DD}">
-      <dgm:prSet/>
-      <dgm:spPr/>
-      <dgm:t>
-        <a:bodyPr/>
-        <a:lstStyle/>
-        <a:p>
-          <a:endParaRPr lang="en-US"/>
-        </a:p>
-      </dgm:t>
-    </dgm:pt>
-    <dgm:pt modelId="{CD1E20AE-4775-684D-8498-EE7E7059A648}" type="sibTrans" cxnId="{6A4FC6C7-58A9-6B46-85E5-00C8A1CFA1DD}">
-      <dgm:prSet/>
-      <dgm:spPr/>
-      <dgm:t>
-        <a:bodyPr/>
-        <a:lstStyle/>
-        <a:p>
-          <a:endParaRPr lang="en-US"/>
-        </a:p>
-      </dgm:t>
-    </dgm:pt>
     <dgm:pt modelId="{EA017C28-89AD-7A40-BC88-911ACC67C8C4}">
       <dgm:prSet/>
       <dgm:spPr>
         <a:solidFill>
-          <a:schemeClr val="bg2">
-            <a:lumMod val="90000"/>
+          <a:schemeClr val="bg1">
+            <a:lumMod val="95000"/>
           </a:schemeClr>
         </a:solidFill>
         <a:ln>
@@ -5730,7 +5668,7 @@
       <dgm:spPr/>
     </dgm:pt>
     <dgm:pt modelId="{13D75330-EB87-1B4E-AD27-5777A5FDE438}" type="pres">
-      <dgm:prSet presAssocID="{5159612C-E3C6-6F4E-92AA-C2F8464AE740}" presName="parentText" presStyleLbl="node1" presStyleIdx="0" presStyleCnt="4" custLinFactY="-91366" custLinFactNeighborY="-100000">
+      <dgm:prSet presAssocID="{5159612C-E3C6-6F4E-92AA-C2F8464AE740}" presName="parentText" presStyleLbl="node1" presStyleIdx="0" presStyleCnt="3" custLinFactY="-91366" custLinFactNeighborY="-100000">
         <dgm:presLayoutVars>
           <dgm:chMax val="0"/>
           <dgm:bulletEnabled val="1"/>
@@ -5743,7 +5681,7 @@
       <dgm:spPr/>
     </dgm:pt>
     <dgm:pt modelId="{370C85E9-6A04-C447-AC7A-8A358FA1CCD2}" type="pres">
-      <dgm:prSet presAssocID="{69E24E03-086A-574E-B78F-530ED2338457}" presName="parentText" presStyleLbl="node1" presStyleIdx="1" presStyleCnt="4" custLinFactY="-5132" custLinFactNeighborY="-100000">
+      <dgm:prSet presAssocID="{69E24E03-086A-574E-B78F-530ED2338457}" presName="parentText" presStyleLbl="node1" presStyleIdx="1" presStyleCnt="3" custLinFactY="-5132" custLinFactNeighborY="-100000">
         <dgm:presLayoutVars>
           <dgm:chMax val="0"/>
           <dgm:bulletEnabled val="1"/>
@@ -5755,21 +5693,8 @@
       <dgm:prSet presAssocID="{76AD5AAA-080A-8B4F-A903-68F521E48FFE}" presName="spacer" presStyleCnt="0"/>
       <dgm:spPr/>
     </dgm:pt>
-    <dgm:pt modelId="{053D8863-8F64-2E41-A872-7BA87DE46291}" type="pres">
-      <dgm:prSet presAssocID="{780EBD0C-B05F-8F4C-A7E5-C87DAC98B864}" presName="parentText" presStyleLbl="node1" presStyleIdx="2" presStyleCnt="4" custLinFactY="13775" custLinFactNeighborY="100000">
-        <dgm:presLayoutVars>
-          <dgm:chMax val="0"/>
-          <dgm:bulletEnabled val="1"/>
-        </dgm:presLayoutVars>
-      </dgm:prSet>
-      <dgm:spPr/>
-    </dgm:pt>
-    <dgm:pt modelId="{88128CC0-ADAE-0B4C-845B-32ADC4A894E2}" type="pres">
-      <dgm:prSet presAssocID="{CD1E20AE-4775-684D-8498-EE7E7059A648}" presName="spacer" presStyleCnt="0"/>
-      <dgm:spPr/>
-    </dgm:pt>
     <dgm:pt modelId="{B40D5D96-C482-1D47-AE85-3140951452DF}" type="pres">
-      <dgm:prSet presAssocID="{EA017C28-89AD-7A40-BC88-911ACC67C8C4}" presName="parentText" presStyleLbl="node1" presStyleIdx="3" presStyleCnt="4" custLinFactY="62269" custLinFactNeighborY="100000">
+      <dgm:prSet presAssocID="{EA017C28-89AD-7A40-BC88-911ACC67C8C4}" presName="parentText" presStyleLbl="node1" presStyleIdx="2" presStyleCnt="3" custLinFactY="62269" custLinFactNeighborY="100000">
         <dgm:presLayoutVars>
           <dgm:chMax val="0"/>
           <dgm:bulletEnabled val="1"/>
@@ -5780,21 +5705,17 @@
   </dgm:ptLst>
   <dgm:cxnLst>
     <dgm:cxn modelId="{19B0B31A-1D85-6346-9A20-A43269842DE2}" srcId="{ACB0FF5F-0DB9-AA4D-B74D-08E8A154D6CE}" destId="{5159612C-E3C6-6F4E-92AA-C2F8464AE740}" srcOrd="0" destOrd="0" parTransId="{2BB50982-115B-F446-9231-A52A65DE02F0}" sibTransId="{69A47304-42F0-0A48-96D4-AB1512C0A1AC}"/>
-    <dgm:cxn modelId="{E7822A25-AA92-8749-874B-DDD5D65B74FC}" type="presOf" srcId="{780EBD0C-B05F-8F4C-A7E5-C87DAC98B864}" destId="{053D8863-8F64-2E41-A872-7BA87DE46291}" srcOrd="0" destOrd="0" presId="urn:microsoft.com/office/officeart/2005/8/layout/vList2"/>
     <dgm:cxn modelId="{BB5D0B4D-2278-6944-991A-3A21CA85FDFB}" type="presOf" srcId="{69E24E03-086A-574E-B78F-530ED2338457}" destId="{370C85E9-6A04-C447-AC7A-8A358FA1CCD2}" srcOrd="0" destOrd="0" presId="urn:microsoft.com/office/officeart/2005/8/layout/vList2"/>
     <dgm:cxn modelId="{8BB2AF4E-BFD9-974C-8161-0184CFD199DD}" type="presOf" srcId="{ACB0FF5F-0DB9-AA4D-B74D-08E8A154D6CE}" destId="{6C8CC437-E4FA-9941-B3C0-D148388B3EBA}" srcOrd="0" destOrd="0" presId="urn:microsoft.com/office/officeart/2005/8/layout/vList2"/>
     <dgm:cxn modelId="{A6DC3A65-ACE2-9F41-8242-99CA85B1F5B0}" type="presOf" srcId="{EA017C28-89AD-7A40-BC88-911ACC67C8C4}" destId="{B40D5D96-C482-1D47-AE85-3140951452DF}" srcOrd="0" destOrd="0" presId="urn:microsoft.com/office/officeart/2005/8/layout/vList2"/>
     <dgm:cxn modelId="{DBD81A8F-7A3F-D446-8ECB-77FAF6050AB5}" type="presOf" srcId="{5159612C-E3C6-6F4E-92AA-C2F8464AE740}" destId="{13D75330-EB87-1B4E-AD27-5777A5FDE438}" srcOrd="0" destOrd="0" presId="urn:microsoft.com/office/officeart/2005/8/layout/vList2"/>
-    <dgm:cxn modelId="{6A4FC6C7-58A9-6B46-85E5-00C8A1CFA1DD}" srcId="{ACB0FF5F-0DB9-AA4D-B74D-08E8A154D6CE}" destId="{780EBD0C-B05F-8F4C-A7E5-C87DAC98B864}" srcOrd="2" destOrd="0" parTransId="{E4FF93A7-BCE2-1146-87A5-76D608855813}" sibTransId="{CD1E20AE-4775-684D-8498-EE7E7059A648}"/>
     <dgm:cxn modelId="{8F626FDB-340E-4D4F-BD35-C4F83F92558A}" srcId="{ACB0FF5F-0DB9-AA4D-B74D-08E8A154D6CE}" destId="{69E24E03-086A-574E-B78F-530ED2338457}" srcOrd="1" destOrd="0" parTransId="{21738E6E-185B-514A-99F5-1D74534C72EF}" sibTransId="{76AD5AAA-080A-8B4F-A903-68F521E48FFE}"/>
-    <dgm:cxn modelId="{AA176FE5-D4CA-F346-8B59-4010A7381BCE}" srcId="{ACB0FF5F-0DB9-AA4D-B74D-08E8A154D6CE}" destId="{EA017C28-89AD-7A40-BC88-911ACC67C8C4}" srcOrd="3" destOrd="0" parTransId="{C0AB897B-87C7-AB47-AB6C-22E89CBBAF8B}" sibTransId="{B4354A4A-09A6-E84A-8157-A9A40E934510}"/>
+    <dgm:cxn modelId="{AA176FE5-D4CA-F346-8B59-4010A7381BCE}" srcId="{ACB0FF5F-0DB9-AA4D-B74D-08E8A154D6CE}" destId="{EA017C28-89AD-7A40-BC88-911ACC67C8C4}" srcOrd="2" destOrd="0" parTransId="{C0AB897B-87C7-AB47-AB6C-22E89CBBAF8B}" sibTransId="{B4354A4A-09A6-E84A-8157-A9A40E934510}"/>
     <dgm:cxn modelId="{A4E48B19-3AF0-684A-BF6A-230BC9996CCB}" type="presParOf" srcId="{6C8CC437-E4FA-9941-B3C0-D148388B3EBA}" destId="{13D75330-EB87-1B4E-AD27-5777A5FDE438}" srcOrd="0" destOrd="0" presId="urn:microsoft.com/office/officeart/2005/8/layout/vList2"/>
     <dgm:cxn modelId="{41482FD4-3F63-0748-A7F0-E5B1FAE7A6EA}" type="presParOf" srcId="{6C8CC437-E4FA-9941-B3C0-D148388B3EBA}" destId="{77F6D5B3-8404-6445-9FAD-B5C196F96C85}" srcOrd="1" destOrd="0" presId="urn:microsoft.com/office/officeart/2005/8/layout/vList2"/>
     <dgm:cxn modelId="{0B048515-788E-D544-B3CD-5134B51CB370}" type="presParOf" srcId="{6C8CC437-E4FA-9941-B3C0-D148388B3EBA}" destId="{370C85E9-6A04-C447-AC7A-8A358FA1CCD2}" srcOrd="2" destOrd="0" presId="urn:microsoft.com/office/officeart/2005/8/layout/vList2"/>
     <dgm:cxn modelId="{E152E1B3-EE45-9846-A351-550C84A57AF2}" type="presParOf" srcId="{6C8CC437-E4FA-9941-B3C0-D148388B3EBA}" destId="{B463EDBB-AB48-DB4A-A494-5EBE9F88A392}" srcOrd="3" destOrd="0" presId="urn:microsoft.com/office/officeart/2005/8/layout/vList2"/>
-    <dgm:cxn modelId="{7749FA49-9FA5-D441-881E-276EF7775522}" type="presParOf" srcId="{6C8CC437-E4FA-9941-B3C0-D148388B3EBA}" destId="{053D8863-8F64-2E41-A872-7BA87DE46291}" srcOrd="4" destOrd="0" presId="urn:microsoft.com/office/officeart/2005/8/layout/vList2"/>
-    <dgm:cxn modelId="{DFEF8F58-E24E-1C46-8653-55679E184DAB}" type="presParOf" srcId="{6C8CC437-E4FA-9941-B3C0-D148388B3EBA}" destId="{88128CC0-ADAE-0B4C-845B-32ADC4A894E2}" srcOrd="5" destOrd="0" presId="urn:microsoft.com/office/officeart/2005/8/layout/vList2"/>
-    <dgm:cxn modelId="{C3EE4860-0BC4-2343-B573-0D9D39605427}" type="presParOf" srcId="{6C8CC437-E4FA-9941-B3C0-D148388B3EBA}" destId="{B40D5D96-C482-1D47-AE85-3140951452DF}" srcOrd="6" destOrd="0" presId="urn:microsoft.com/office/officeart/2005/8/layout/vList2"/>
+    <dgm:cxn modelId="{C3EE4860-0BC4-2343-B573-0D9D39605427}" type="presParOf" srcId="{6C8CC437-E4FA-9941-B3C0-D148388B3EBA}" destId="{B40D5D96-C482-1D47-AE85-3140951452DF}" srcOrd="4" destOrd="0" presId="urn:microsoft.com/office/officeart/2005/8/layout/vList2"/>
   </dgm:cxnLst>
   <dgm:bg/>
   <dgm:whole/>
@@ -7189,8 +7110,13 @@
           </a:r>
           <a:r>
             <a:rPr lang="en-US" sz="2200" kern="1200" dirty="0"/>
-            <a:t>: Healthy and disease are  not distinguishable</a:t>
+            <a:t>: </a:t>
           </a:r>
+          <a:r>
+            <a:rPr lang="en-US" sz="2000" kern="1200" dirty="0"/>
+            <a:t>Healthy and disease are distinguishable but not disease class</a:t>
+          </a:r>
+          <a:endParaRPr lang="en-US" sz="2200" kern="1200" dirty="0"/>
         </a:p>
       </dsp:txBody>
       <dsp:txXfrm>
@@ -7776,14 +7702,14 @@
       <dsp:spPr>
         <a:xfrm>
           <a:off x="0" y="0"/>
-          <a:ext cx="5449095" cy="795600"/>
+          <a:ext cx="5449095" cy="1319759"/>
         </a:xfrm>
         <a:prstGeom prst="roundRect">
           <a:avLst/>
         </a:prstGeom>
         <a:solidFill>
-          <a:schemeClr val="bg2">
-            <a:lumMod val="90000"/>
+          <a:schemeClr val="bg1">
+            <a:lumMod val="95000"/>
           </a:schemeClr>
         </a:solidFill>
         <a:ln w="19050" cap="flat" cmpd="sng" algn="ctr">
@@ -7808,12 +7734,12 @@
         </a:fontRef>
       </dsp:style>
       <dsp:txBody>
-        <a:bodyPr spcFirstLastPara="0" vert="horz" wrap="square" lIns="76200" tIns="76200" rIns="76200" bIns="76200" numCol="1" spcCol="1270" anchor="ctr" anchorCtr="0">
+        <a:bodyPr spcFirstLastPara="0" vert="horz" wrap="square" lIns="91440" tIns="91440" rIns="91440" bIns="91440" numCol="1" spcCol="1270" anchor="ctr" anchorCtr="0">
           <a:noAutofit/>
         </a:bodyPr>
         <a:lstStyle/>
         <a:p>
-          <a:pPr marL="0" lvl="0" indent="0" algn="l" defTabSz="889000">
+          <a:pPr marL="0" lvl="0" indent="0" algn="l" defTabSz="1066800">
             <a:lnSpc>
               <a:spcPct val="90000"/>
             </a:lnSpc>
@@ -7826,11 +7752,11 @@
             <a:buNone/>
           </a:pPr>
           <a:r>
-            <a:rPr lang="en-US" sz="2000" kern="1200" dirty="0"/>
+            <a:rPr lang="en-US" sz="2400" kern="1200" dirty="0"/>
             <a:t>Multiclass Classification is not the best suited task for this data set </a:t>
           </a:r>
           <a:r>
-            <a:rPr lang="en-US" sz="2000" b="1" kern="1200" cap="none" spc="0" dirty="0">
+            <a:rPr lang="en-US" sz="2400" b="1" kern="1200" cap="none" spc="0" dirty="0">
               <a:ln w="0"/>
               <a:solidFill>
                 <a:schemeClr val="accent3"/>
@@ -7845,7 +7771,7 @@
             </a:rPr>
             <a:t>→ Anomaly detection </a:t>
           </a:r>
-          <a:endParaRPr lang="en-US" sz="2000" b="1" kern="1200" dirty="0">
+          <a:endParaRPr lang="en-US" sz="2400" b="1" kern="1200" dirty="0">
             <a:solidFill>
               <a:schemeClr val="accent3"/>
             </a:solidFill>
@@ -7853,8 +7779,8 @@
         </a:p>
       </dsp:txBody>
       <dsp:txXfrm>
-        <a:off x="38838" y="38838"/>
-        <a:ext cx="5371419" cy="717924"/>
+        <a:off x="64425" y="64425"/>
+        <a:ext cx="5320245" cy="1190909"/>
       </dsp:txXfrm>
     </dsp:sp>
     <dsp:sp modelId="{370C85E9-6A04-C447-AC7A-8A358FA1CCD2}">
@@ -7864,15 +7790,15 @@
       </dsp:nvSpPr>
       <dsp:spPr>
         <a:xfrm>
-          <a:off x="0" y="1200828"/>
-          <a:ext cx="5449095" cy="795600"/>
+          <a:off x="0" y="1326928"/>
+          <a:ext cx="5449095" cy="1319759"/>
         </a:xfrm>
         <a:prstGeom prst="roundRect">
           <a:avLst/>
         </a:prstGeom>
         <a:solidFill>
-          <a:schemeClr val="bg2">
-            <a:lumMod val="90000"/>
+          <a:schemeClr val="bg1">
+            <a:lumMod val="95000"/>
           </a:schemeClr>
         </a:solidFill>
         <a:ln w="19050" cap="flat" cmpd="sng" algn="ctr">
@@ -7897,12 +7823,12 @@
         </a:fontRef>
       </dsp:style>
       <dsp:txBody>
-        <a:bodyPr spcFirstLastPara="0" vert="horz" wrap="square" lIns="76200" tIns="76200" rIns="76200" bIns="76200" numCol="1" spcCol="1270" anchor="ctr" anchorCtr="0">
+        <a:bodyPr spcFirstLastPara="0" vert="horz" wrap="square" lIns="91440" tIns="91440" rIns="91440" bIns="91440" numCol="1" spcCol="1270" anchor="ctr" anchorCtr="0">
           <a:noAutofit/>
         </a:bodyPr>
         <a:lstStyle/>
         <a:p>
-          <a:pPr marL="0" lvl="0" indent="0" algn="l" defTabSz="889000">
+          <a:pPr marL="0" lvl="0" indent="0" algn="l" defTabSz="1066800">
             <a:lnSpc>
               <a:spcPct val="90000"/>
             </a:lnSpc>
@@ -7915,11 +7841,11 @@
             <a:buNone/>
           </a:pPr>
           <a:r>
-            <a:rPr lang="en-US" sz="2000" kern="1200" dirty="0"/>
+            <a:rPr lang="en-US" sz="2400" kern="1200" dirty="0"/>
             <a:t>Higher </a:t>
           </a:r>
           <a:r>
-            <a:rPr lang="en-US" sz="2000" b="1" kern="1200" dirty="0">
+            <a:rPr lang="en-US" sz="2400" b="1" kern="1200" dirty="0">
               <a:solidFill>
                 <a:schemeClr val="tx2">
                   <a:lumMod val="75000"/>
@@ -7930,11 +7856,11 @@
             <a:t>model complexity </a:t>
           </a:r>
           <a:r>
-            <a:rPr lang="en-US" sz="2000" kern="1200" dirty="0"/>
+            <a:rPr lang="en-US" sz="2400" kern="1200" dirty="0"/>
             <a:t>doesn’t translate into </a:t>
           </a:r>
           <a:r>
-            <a:rPr lang="en-US" sz="2000" b="1" kern="1200" dirty="0">
+            <a:rPr lang="en-US" sz="2400" b="1" kern="1200" dirty="0">
               <a:solidFill>
                 <a:schemeClr val="tx2">
                   <a:lumMod val="75000"/>
@@ -7945,7 +7871,7 @@
             <a:t>better performance</a:t>
           </a:r>
           <a:r>
-            <a:rPr lang="en-US" sz="2000" kern="1200" dirty="0">
+            <a:rPr lang="en-US" sz="2400" kern="1200" dirty="0">
               <a:solidFill>
                 <a:schemeClr val="tx2">
                   <a:lumMod val="75000"/>
@@ -7958,26 +7884,26 @@
         </a:p>
       </dsp:txBody>
       <dsp:txXfrm>
-        <a:off x="38838" y="1239666"/>
-        <a:ext cx="5371419" cy="717924"/>
+        <a:off x="64425" y="1391353"/>
+        <a:ext cx="5320245" cy="1190909"/>
       </dsp:txXfrm>
     </dsp:sp>
-    <dsp:sp modelId="{053D8863-8F64-2E41-A872-7BA87DE46291}">
+    <dsp:sp modelId="{B40D5D96-C482-1D47-AE85-3140951452DF}">
       <dsp:nvSpPr>
         <dsp:cNvPr id="0" name=""/>
         <dsp:cNvSpPr/>
       </dsp:nvSpPr>
       <dsp:spPr>
         <a:xfrm>
-          <a:off x="0" y="2319652"/>
-          <a:ext cx="5449095" cy="795600"/>
+          <a:off x="0" y="2927557"/>
+          <a:ext cx="5449095" cy="1319759"/>
         </a:xfrm>
         <a:prstGeom prst="roundRect">
           <a:avLst/>
         </a:prstGeom>
         <a:solidFill>
-          <a:schemeClr val="bg2">
-            <a:lumMod val="90000"/>
+          <a:schemeClr val="bg1">
+            <a:lumMod val="95000"/>
           </a:schemeClr>
         </a:solidFill>
         <a:ln w="19050" cap="flat" cmpd="sng" algn="ctr">
@@ -8002,12 +7928,12 @@
         </a:fontRef>
       </dsp:style>
       <dsp:txBody>
-        <a:bodyPr spcFirstLastPara="0" vert="horz" wrap="square" lIns="76200" tIns="76200" rIns="76200" bIns="76200" numCol="1" spcCol="1270" anchor="ctr" anchorCtr="0">
+        <a:bodyPr spcFirstLastPara="0" vert="horz" wrap="square" lIns="91440" tIns="91440" rIns="91440" bIns="91440" numCol="1" spcCol="1270" anchor="ctr" anchorCtr="0">
           <a:noAutofit/>
         </a:bodyPr>
         <a:lstStyle/>
         <a:p>
-          <a:pPr marL="0" lvl="0" indent="0" algn="l" defTabSz="889000">
+          <a:pPr marL="0" lvl="0" indent="0" algn="l" defTabSz="1066800">
             <a:lnSpc>
               <a:spcPct val="90000"/>
             </a:lnSpc>
@@ -8020,101 +7946,11 @@
             <a:buNone/>
           </a:pPr>
           <a:r>
-            <a:rPr lang="en-US" sz="2000" b="1" kern="1200" dirty="0">
-              <a:solidFill>
-                <a:schemeClr val="tx2">
-                  <a:lumMod val="75000"/>
-                  <a:lumOff val="25000"/>
-                </a:schemeClr>
-              </a:solidFill>
-            </a:rPr>
-            <a:t>Hyperparameter tunning</a:t>
-          </a:r>
-          <a:r>
-            <a:rPr lang="en-US" sz="2000" kern="1200" dirty="0">
-              <a:solidFill>
-                <a:schemeClr val="tx2">
-                  <a:lumMod val="75000"/>
-                  <a:lumOff val="25000"/>
-                </a:schemeClr>
-              </a:solidFill>
-            </a:rPr>
-            <a:t>: </a:t>
-          </a:r>
-          <a:r>
-            <a:rPr lang="en-US" sz="2000" kern="1200" dirty="0"/>
-            <a:t>Better fitted from more complex tasks</a:t>
-          </a:r>
-        </a:p>
-      </dsp:txBody>
-      <dsp:txXfrm>
-        <a:off x="38838" y="2358490"/>
-        <a:ext cx="5371419" cy="717924"/>
-      </dsp:txXfrm>
-    </dsp:sp>
-    <dsp:sp modelId="{B40D5D96-C482-1D47-AE85-3140951452DF}">
-      <dsp:nvSpPr>
-        <dsp:cNvPr id="0" name=""/>
-        <dsp:cNvSpPr/>
-      </dsp:nvSpPr>
-      <dsp:spPr>
-        <a:xfrm>
-          <a:off x="0" y="3451717"/>
-          <a:ext cx="5449095" cy="795600"/>
-        </a:xfrm>
-        <a:prstGeom prst="roundRect">
-          <a:avLst/>
-        </a:prstGeom>
-        <a:solidFill>
-          <a:schemeClr val="bg2">
-            <a:lumMod val="90000"/>
-          </a:schemeClr>
-        </a:solidFill>
-        <a:ln w="19050" cap="flat" cmpd="sng" algn="ctr">
-          <a:noFill/>
-          <a:prstDash val="solid"/>
-          <a:miter lim="800000"/>
-        </a:ln>
-        <a:effectLst/>
-      </dsp:spPr>
-      <dsp:style>
-        <a:lnRef idx="2">
-          <a:scrgbClr r="0" g="0" b="0"/>
-        </a:lnRef>
-        <a:fillRef idx="1">
-          <a:scrgbClr r="0" g="0" b="0"/>
-        </a:fillRef>
-        <a:effectRef idx="0">
-          <a:scrgbClr r="0" g="0" b="0"/>
-        </a:effectRef>
-        <a:fontRef idx="minor">
-          <a:schemeClr val="lt1"/>
-        </a:fontRef>
-      </dsp:style>
-      <dsp:txBody>
-        <a:bodyPr spcFirstLastPara="0" vert="horz" wrap="square" lIns="76200" tIns="76200" rIns="76200" bIns="76200" numCol="1" spcCol="1270" anchor="ctr" anchorCtr="0">
-          <a:noAutofit/>
-        </a:bodyPr>
-        <a:lstStyle/>
-        <a:p>
-          <a:pPr marL="0" lvl="0" indent="0" algn="l" defTabSz="889000">
-            <a:lnSpc>
-              <a:spcPct val="90000"/>
-            </a:lnSpc>
-            <a:spcBef>
-              <a:spcPct val="0"/>
-            </a:spcBef>
-            <a:spcAft>
-              <a:spcPct val="35000"/>
-            </a:spcAft>
-            <a:buNone/>
-          </a:pPr>
-          <a:r>
-            <a:rPr lang="en-US" sz="2000" kern="1200" dirty="0"/>
+            <a:rPr lang="en-US" sz="2400" kern="1200" dirty="0"/>
             <a:t>Biggest performance gain obtained by  modifying the </a:t>
           </a:r>
           <a:r>
-            <a:rPr lang="en-US" sz="2000" b="1" kern="1200" dirty="0">
+            <a:rPr lang="en-US" sz="2400" b="1" kern="1200" dirty="0">
               <a:solidFill>
                 <a:schemeClr val="accent2"/>
               </a:solidFill>
@@ -8122,14 +7958,14 @@
             <a:t>Cross Entropy loss weights</a:t>
           </a:r>
           <a:r>
-            <a:rPr lang="en-US" sz="2000" kern="1200" dirty="0"/>
+            <a:rPr lang="en-US" sz="2400" kern="1200" dirty="0"/>
             <a:t>.</a:t>
           </a:r>
         </a:p>
       </dsp:txBody>
       <dsp:txXfrm>
-        <a:off x="38838" y="3490555"/>
-        <a:ext cx="5371419" cy="717924"/>
+        <a:off x="64425" y="2991982"/>
+        <a:ext cx="5320245" cy="1190909"/>
       </dsp:txXfrm>
     </dsp:sp>
   </dsp:spTree>
@@ -17626,7 +17462,7 @@
             <p:ph idx="1"/>
             <p:extLst>
               <p:ext uri="{D42A27DB-BD31-4B8C-83A1-F6EECF244321}">
-                <p14:modId xmlns:p14="http://schemas.microsoft.com/office/powerpoint/2010/main" val="4211366214"/>
+                <p14:modId xmlns:p14="http://schemas.microsoft.com/office/powerpoint/2010/main" val="1566346973"/>
               </p:ext>
             </p:extLst>
           </p:nvPr>
@@ -17879,7 +17715,7 @@
           <p:nvPr>
             <p:extLst>
               <p:ext uri="{D42A27DB-BD31-4B8C-83A1-F6EECF244321}">
-                <p14:modId xmlns:p14="http://schemas.microsoft.com/office/powerpoint/2010/main" val="892601912"/>
+                <p14:modId xmlns:p14="http://schemas.microsoft.com/office/powerpoint/2010/main" val="2670758974"/>
               </p:ext>
             </p:extLst>
           </p:nvPr>
@@ -21538,8 +21374,8 @@
           <a:p>
             <a:pPr algn="ctr"/>
             <a:r>
-              <a:rPr lang="en-US" dirty="0"/>
-              <a:t>Train 500 Val 2500 Test 2500</a:t>
+              <a:rPr lang="en-US" b="1" dirty="0"/>
+              <a:t>50/50 split</a:t>
             </a:r>
           </a:p>
         </p:txBody>
@@ -21691,8 +21527,12 @@
           <a:lstStyle/>
           <a:p>
             <a:r>
+              <a:rPr lang="en-US" b="1" dirty="0"/>
+              <a:t>Model</a:t>
+            </a:r>
+            <a:r>
               <a:rPr lang="en-US" dirty="0"/>
-              <a:t>Model: transformer</a:t>
+              <a:t>: transformer</a:t>
             </a:r>
           </a:p>
         </p:txBody>
@@ -21751,6 +21591,123 @@
             <a:r>
               <a:rPr lang="en-US" dirty="0"/>
               <a:t>Healthy vs disease</a:t>
+            </a:r>
+          </a:p>
+        </p:txBody>
+      </p:sp>
+      <p:sp>
+        <p:nvSpPr>
+          <p:cNvPr id="2" name="TextBox 1">
+            <a:extLst>
+              <a:ext uri="{FF2B5EF4-FFF2-40B4-BE49-F238E27FC236}">
+                <a16:creationId xmlns:a16="http://schemas.microsoft.com/office/drawing/2014/main" id="{DFDE185D-66B6-CA9D-1BB7-B16ACFBC02BF}"/>
+              </a:ext>
+            </a:extLst>
+          </p:cNvPr>
+          <p:cNvSpPr txBox="1"/>
+          <p:nvPr/>
+        </p:nvSpPr>
+        <p:spPr>
+          <a:xfrm>
+            <a:off x="2315337" y="5498177"/>
+            <a:ext cx="1661673" cy="369332"/>
+          </a:xfrm>
+          <a:prstGeom prst="rect">
+            <a:avLst/>
+          </a:prstGeom>
+          <a:noFill/>
+        </p:spPr>
+        <p:txBody>
+          <a:bodyPr wrap="none" rtlCol="0">
+            <a:spAutoFit/>
+          </a:bodyPr>
+          <a:lstStyle/>
+          <a:p>
+            <a:r>
+              <a:rPr lang="en-US" b="1" dirty="0"/>
+              <a:t>F1 score</a:t>
+            </a:r>
+            <a:r>
+              <a:rPr lang="en-US" dirty="0"/>
+              <a:t>: 0.59 </a:t>
+            </a:r>
+          </a:p>
+        </p:txBody>
+      </p:sp>
+      <p:sp>
+        <p:nvSpPr>
+          <p:cNvPr id="3" name="TextBox 2">
+            <a:extLst>
+              <a:ext uri="{FF2B5EF4-FFF2-40B4-BE49-F238E27FC236}">
+                <a16:creationId xmlns:a16="http://schemas.microsoft.com/office/drawing/2014/main" id="{8A107EE2-DECC-77B9-7239-4446363A0C05}"/>
+              </a:ext>
+            </a:extLst>
+          </p:cNvPr>
+          <p:cNvSpPr txBox="1"/>
+          <p:nvPr/>
+        </p:nvSpPr>
+        <p:spPr>
+          <a:xfrm>
+            <a:off x="8112099" y="3414795"/>
+            <a:ext cx="1661673" cy="369332"/>
+          </a:xfrm>
+          <a:prstGeom prst="rect">
+            <a:avLst/>
+          </a:prstGeom>
+          <a:noFill/>
+        </p:spPr>
+        <p:txBody>
+          <a:bodyPr wrap="none" rtlCol="0">
+            <a:spAutoFit/>
+          </a:bodyPr>
+          <a:lstStyle/>
+          <a:p>
+            <a:r>
+              <a:rPr lang="en-US" b="1" dirty="0"/>
+              <a:t>F1 score</a:t>
+            </a:r>
+            <a:r>
+              <a:rPr lang="en-US" dirty="0"/>
+              <a:t>: 0.82 </a:t>
+            </a:r>
+          </a:p>
+        </p:txBody>
+      </p:sp>
+      <p:sp>
+        <p:nvSpPr>
+          <p:cNvPr id="4" name="TextBox 3">
+            <a:extLst>
+              <a:ext uri="{FF2B5EF4-FFF2-40B4-BE49-F238E27FC236}">
+                <a16:creationId xmlns:a16="http://schemas.microsoft.com/office/drawing/2014/main" id="{426EA32C-100D-B149-82E0-A675998D7B81}"/>
+              </a:ext>
+            </a:extLst>
+          </p:cNvPr>
+          <p:cNvSpPr txBox="1"/>
+          <p:nvPr/>
+        </p:nvSpPr>
+        <p:spPr>
+          <a:xfrm>
+            <a:off x="8203775" y="6488668"/>
+            <a:ext cx="1661673" cy="369332"/>
+          </a:xfrm>
+          <a:prstGeom prst="rect">
+            <a:avLst/>
+          </a:prstGeom>
+          <a:noFill/>
+        </p:spPr>
+        <p:txBody>
+          <a:bodyPr wrap="none" rtlCol="0">
+            <a:spAutoFit/>
+          </a:bodyPr>
+          <a:lstStyle/>
+          <a:p>
+            <a:r>
+              <a:rPr lang="en-US" b="1" dirty="0"/>
+              <a:t>F1 score</a:t>
+            </a:r>
+            <a:r>
+              <a:rPr lang="en-US" dirty="0"/>
+              <a:t>: 0.98 </a:t>
             </a:r>
           </a:p>
         </p:txBody>
